--- a/public/fun/pack/pptx/reviewpro/보장점검양식프리미엄_47_부부점검_다크로즈골드.pptx
+++ b/public/fun/pack/pptx/reviewpro/보장점검양식프리미엄_47_부부점검_다크로즈골드.pptx
@@ -112,12 +112,12 @@
   <p:extLst>
     <p:ext uri="{521415D9-36F7-43E2-AB2F-B90AF26B5E84}">
       <p14:sectionLst xmlns:p14="http://schemas.microsoft.com/office/powerpoint/2010/main">
-        <p14:section name="시작" id="{5B089162-69D8-477E-8C91-30DA0107B961}">
+        <p14:section name="시작" id="{C1E81E15-3787-4C19-84C0-9A582860FC41}">
           <p14:sldIdLst>
             <p14:sldId id="256"/>
           </p14:sldIdLst>
         </p14:section>
-        <p14:section name="본문" id="{B633FBCC-7788-4329-964E-198CBAD639A7}">
+        <p14:section name="본문" id="{99816305-D83A-4891-991E-4F10E3537AB7}">
           <p14:sldIdLst>
             <p14:sldId id="257"/>
             <p14:sldId id="258"/>
@@ -1563,7 +1563,7 @@
             </a:lvl1pPr>
           </a:lstStyle>
           <a:p>
-            <a:fld id="{D3713D3B-7F19-45B2-A65C-7EF265E958DE}" type="slidenum">
+            <a:fld id="{01919615-3E31-4CF4-9359-23F240167770}" type="slidenum">
               <a:rPr lang="en-US"/>
               <a:t>‹#›</a:t>
             </a:fld>
@@ -2148,7 +2148,7 @@
             </a:lvl1pPr>
           </a:lstStyle>
           <a:p>
-            <a:fld id="{74D6C9CD-D943-4D02-9B9B-EA4E3085FBCD}" type="slidenum">
+            <a:fld id="{215B4300-7F33-421A-AC4F-7693B98F483A}" type="slidenum">
               <a:rPr lang="en-US"/>
               <a:t>‹#›</a:t>
             </a:fld>
@@ -2742,7 +2742,7 @@
             </a:lvl1pPr>
           </a:lstStyle>
           <a:p>
-            <a:fld id="{D350BC29-0D19-4E32-8004-DA989E9AF59B}" type="slidenum">
+            <a:fld id="{D79B2C7A-C77E-470A-B145-3059B2658C74}" type="slidenum">
               <a:rPr lang="en-US"/>
               <a:t>‹#›</a:t>
             </a:fld>
@@ -3523,7 +3523,7 @@
           <a:p>
             <a:r>
               <a:rPr lang="ko-KR"/>
-              <a:t>새해 계획 세울 때 같이 봅니다</a:t>
+              <a:t>계획 세울 때 같이 봅니다</a:t>
             </a:r>
           </a:p>
         </p:txBody>
@@ -3545,7 +3545,7 @@
           <a:p>
             <a:r>
               <a:rPr lang="ko-KR"/>
-              <a:t>부부 점검 · 0000. 00. 00</a:t>
+              <a:t>부부 점검 · 날짜 입력</a:t>
             </a:r>
           </a:p>
           <a:p>
@@ -3636,7 +3636,7 @@
           <a:bodyPr/>
           <a:lstStyle/>
           <a:p>
-            <a:fld id="{ED432037-9E95-4740-A59B-FC63967B91AC}" type="slidenum">
+            <a:fld id="{F7B2328E-2652-41F1-B80E-349770728384}" type="slidenum">
               <a:rPr lang="en-US"/>
               <a:t>‹#›</a:t>
             </a:fld>
@@ -4349,7 +4349,7 @@
           <a:bodyPr/>
           <a:lstStyle/>
           <a:p>
-            <a:fld id="{15464BB3-35C4-4E26-9F02-3DA04CD21C97}" type="slidenum">
+            <a:fld id="{E63FBE1E-3427-4D00-9723-0C611731298A}" type="slidenum">
               <a:rPr lang="en-US"/>
               <a:t>‹#›</a:t>
             </a:fld>
@@ -5855,7 +5855,7 @@
           <a:bodyPr/>
           <a:lstStyle/>
           <a:p>
-            <a:fld id="{872E1A9F-4A1A-4CAD-8978-8672BFB3A13F}" type="slidenum">
+            <a:fld id="{B9B8C66C-6766-4F70-98D2-8AB739FDC760}" type="slidenum">
               <a:rPr lang="en-US"/>
               <a:t>‹#›</a:t>
             </a:fld>
@@ -7405,7 +7405,7 @@
           <a:bodyPr/>
           <a:lstStyle/>
           <a:p>
-            <a:fld id="{5723D39B-D3BD-4C6B-99D4-F6211CDFCE4C}" type="slidenum">
+            <a:fld id="{C6809764-A075-4263-B3CA-55BC97B78109}" type="slidenum">
               <a:rPr lang="en-US"/>
               <a:t>‹#›</a:t>
             </a:fld>
@@ -8267,7 +8267,7 @@
           <a:bodyPr/>
           <a:lstStyle/>
           <a:p>
-            <a:fld id="{C754BBAF-25E8-4F5F-9A59-13C4CEA3B6A0}" type="slidenum">
+            <a:fld id="{3B3ADEFA-6327-416F-829C-11E81D7AF8F6}" type="slidenum">
               <a:rPr lang="en-US"/>
               <a:t>‹#›</a:t>
             </a:fld>
